--- a/submission/Revise1/Rev1_Presentation.pptx
+++ b/submission/Revise1/Rev1_Presentation.pptx
@@ -254,7 +254,7 @@
   </p:defaultTextStyle>
   <p:extLst>
     <p:ext uri="GoogleSlidesCustomDataVersion2">
-      <go:slidesCustomData xmlns:go="http://customooxmlschemas.google.com/" r:id="rId17" roundtripDataSignature="AMtx7mjpFUmx/SFnKUDVlQvuEQZtFk0SBw=="/>
+      <go:slidesCustomData xmlns:go="http://customooxmlschemas.google.com/" r:id="rId17" roundtripDataSignature="AMtx7mgeo/o6Nz7ANHoDAtjrIRhOgdkVYQ=="/>
     </p:ext>
   </p:extLst>
 </p:presentation>
@@ -1881,7 +1881,7 @@
   <p:cSld>
     <p:spTree>
       <p:nvGrpSpPr>
-        <p:cNvPr id="189" name="Shape 189"/>
+        <p:cNvPr id="192" name="Shape 192"/>
         <p:cNvGrpSpPr/>
         <p:nvPr/>
       </p:nvGrpSpPr>
@@ -1895,7 +1895,7 @@
       </p:grpSpPr>
       <p:sp>
         <p:nvSpPr>
-          <p:cNvPr id="190" name="Google Shape;190;p10:notes"/>
+          <p:cNvPr id="193" name="Google Shape;193;p10:notes"/>
           <p:cNvSpPr/>
           <p:nvPr>
             <p:ph idx="2" type="sldImg"/>
@@ -1940,7 +1940,7 @@
       </p:sp>
       <p:sp>
         <p:nvSpPr>
-          <p:cNvPr id="191" name="Google Shape;191;p10:notes"/>
+          <p:cNvPr id="194" name="Google Shape;194;p10:notes"/>
           <p:cNvSpPr txBox="1"/>
           <p:nvPr>
             <p:ph idx="1" type="body"/>
@@ -2125,7 +2125,39 @@
                 <a:cs typeface="Calibri"/>
                 <a:sym typeface="Calibri"/>
               </a:rPr>
-              <a:t>He also asked a sharp question — is the Gini confounded because poor agents die first? We added a note </a:t>
+              <a:t>He also asked a sharp question — is the Gini confounded because poor agents die first? When a large number of poor agents die in the virtual environment, the Gini coefficient becomes a misleading indicator of inequality. Although the society may still exhibit high inequality, the removal of poor agents from the population means that the Gini coefficient is calculated only over the surviving, wealthier agents. As a result, it underestimates the true extent of wealth disparity and may falsely suggest that inequality has decreased.</a:t>
+            </a:r>
+            <a:endParaRPr sz="1200">
+              <a:solidFill>
+                <a:schemeClr val="dk1"/>
+              </a:solidFill>
+              <a:latin typeface="Calibri"/>
+              <a:ea typeface="Calibri"/>
+              <a:cs typeface="Calibri"/>
+              <a:sym typeface="Calibri"/>
+            </a:endParaRPr>
+          </a:p>
+          <a:p>
+            <a:pPr indent="0" lvl="0" marL="0" rtl="0" algn="l">
+              <a:spcBef>
+                <a:spcPts val="0"/>
+              </a:spcBef>
+              <a:spcAft>
+                <a:spcPts val="0"/>
+              </a:spcAft>
+              <a:buNone/>
+            </a:pPr>
+            <a:r>
+              <a:rPr lang="en-US" sz="1200">
+                <a:solidFill>
+                  <a:schemeClr val="dk1"/>
+                </a:solidFill>
+                <a:latin typeface="Calibri"/>
+                <a:ea typeface="Calibri"/>
+                <a:cs typeface="Calibri"/>
+                <a:sym typeface="Calibri"/>
+              </a:rPr>
+              <a:t>We added a note </a:t>
             </a:r>
             <a:r>
               <a:rPr lang="en-US"/>
@@ -2525,7 +2557,7 @@
       </p:sp>
       <p:sp>
         <p:nvSpPr>
-          <p:cNvPr id="192" name="Google Shape;192;p10:notes"/>
+          <p:cNvPr id="195" name="Google Shape;195;p10:notes"/>
           <p:cNvSpPr txBox="1"/>
           <p:nvPr>
             <p:ph idx="12" type="sldNum"/>
@@ -2580,7 +2612,7 @@
   <p:cSld>
     <p:spTree>
       <p:nvGrpSpPr>
-        <p:cNvPr id="212" name="Shape 212"/>
+        <p:cNvPr id="216" name="Shape 216"/>
         <p:cNvGrpSpPr/>
         <p:nvPr/>
       </p:nvGrpSpPr>
@@ -2594,7 +2626,7 @@
       </p:grpSpPr>
       <p:sp>
         <p:nvSpPr>
-          <p:cNvPr id="213" name="Google Shape;213;p11:notes"/>
+          <p:cNvPr id="217" name="Google Shape;217;p11:notes"/>
           <p:cNvSpPr/>
           <p:nvPr>
             <p:ph idx="2" type="sldImg"/>
@@ -2639,7 +2671,7 @@
       </p:sp>
       <p:sp>
         <p:nvSpPr>
-          <p:cNvPr id="214" name="Google Shape;214;p11:notes"/>
+          <p:cNvPr id="218" name="Google Shape;218;p11:notes"/>
           <p:cNvSpPr txBox="1"/>
           <p:nvPr>
             <p:ph idx="1" type="body"/>
@@ -3208,7 +3240,7 @@
       </p:sp>
       <p:sp>
         <p:nvSpPr>
-          <p:cNvPr id="215" name="Google Shape;215;p11:notes"/>
+          <p:cNvPr id="219" name="Google Shape;219;p11:notes"/>
           <p:cNvSpPr txBox="1"/>
           <p:nvPr>
             <p:ph idx="12" type="sldNum"/>
@@ -3263,7 +3295,7 @@
   <p:cSld>
     <p:spTree>
       <p:nvGrpSpPr>
-        <p:cNvPr id="237" name="Shape 237"/>
+        <p:cNvPr id="241" name="Shape 241"/>
         <p:cNvGrpSpPr/>
         <p:nvPr/>
       </p:nvGrpSpPr>
@@ -3277,7 +3309,7 @@
       </p:grpSpPr>
       <p:sp>
         <p:nvSpPr>
-          <p:cNvPr id="238" name="Google Shape;238;p12:notes"/>
+          <p:cNvPr id="242" name="Google Shape;242;p12:notes"/>
           <p:cNvSpPr/>
           <p:nvPr>
             <p:ph idx="2" type="sldImg"/>
@@ -3322,7 +3354,7 @@
       </p:sp>
       <p:sp>
         <p:nvSpPr>
-          <p:cNvPr id="239" name="Google Shape;239;p12:notes"/>
+          <p:cNvPr id="243" name="Google Shape;243;p12:notes"/>
           <p:cNvSpPr txBox="1"/>
           <p:nvPr>
             <p:ph idx="1" type="body"/>
@@ -3907,7 +3939,7 @@
       </p:sp>
       <p:sp>
         <p:nvSpPr>
-          <p:cNvPr id="240" name="Google Shape;240;p12:notes"/>
+          <p:cNvPr id="244" name="Google Shape;244;p12:notes"/>
           <p:cNvSpPr txBox="1"/>
           <p:nvPr>
             <p:ph idx="12" type="sldNum"/>
@@ -6083,7 +6115,7 @@
   <p:cSld>
     <p:spTree>
       <p:nvGrpSpPr>
-        <p:cNvPr id="115" name="Shape 115"/>
+        <p:cNvPr id="117" name="Shape 117"/>
         <p:cNvGrpSpPr/>
         <p:nvPr/>
       </p:nvGrpSpPr>
@@ -6097,7 +6129,7 @@
       </p:grpSpPr>
       <p:sp>
         <p:nvSpPr>
-          <p:cNvPr id="116" name="Google Shape;116;p6:notes"/>
+          <p:cNvPr id="118" name="Google Shape;118;p6:notes"/>
           <p:cNvSpPr/>
           <p:nvPr>
             <p:ph idx="2" type="sldImg"/>
@@ -6142,7 +6174,7 @@
       </p:sp>
       <p:sp>
         <p:nvSpPr>
-          <p:cNvPr id="117" name="Google Shape;117;p6:notes"/>
+          <p:cNvPr id="119" name="Google Shape;119;p6:notes"/>
           <p:cNvSpPr txBox="1"/>
           <p:nvPr>
             <p:ph idx="1" type="body"/>
@@ -6570,7 +6602,7 @@
       </p:sp>
       <p:sp>
         <p:nvSpPr>
-          <p:cNvPr id="118" name="Google Shape;118;p6:notes"/>
+          <p:cNvPr id="120" name="Google Shape;120;p6:notes"/>
           <p:cNvSpPr txBox="1"/>
           <p:nvPr>
             <p:ph idx="12" type="sldNum"/>
@@ -6625,7 +6657,7 @@
   <p:cSld>
     <p:spTree>
       <p:nvGrpSpPr>
-        <p:cNvPr id="133" name="Shape 133"/>
+        <p:cNvPr id="135" name="Shape 135"/>
         <p:cNvGrpSpPr/>
         <p:nvPr/>
       </p:nvGrpSpPr>
@@ -6639,7 +6671,7 @@
       </p:grpSpPr>
       <p:sp>
         <p:nvSpPr>
-          <p:cNvPr id="134" name="Google Shape;134;p7:notes"/>
+          <p:cNvPr id="136" name="Google Shape;136;p7:notes"/>
           <p:cNvSpPr/>
           <p:nvPr>
             <p:ph idx="2" type="sldImg"/>
@@ -6684,7 +6716,7 @@
       </p:sp>
       <p:sp>
         <p:nvSpPr>
-          <p:cNvPr id="135" name="Google Shape;135;p7:notes"/>
+          <p:cNvPr id="137" name="Google Shape;137;p7:notes"/>
           <p:cNvSpPr txBox="1"/>
           <p:nvPr>
             <p:ph idx="1" type="body"/>
@@ -7159,7 +7191,7 @@
       </p:sp>
       <p:sp>
         <p:nvSpPr>
-          <p:cNvPr id="136" name="Google Shape;136;p7:notes"/>
+          <p:cNvPr id="138" name="Google Shape;138;p7:notes"/>
           <p:cNvSpPr txBox="1"/>
           <p:nvPr>
             <p:ph idx="12" type="sldNum"/>
@@ -7214,7 +7246,7 @@
   <p:cSld>
     <p:spTree>
       <p:nvGrpSpPr>
-        <p:cNvPr id="158" name="Shape 158"/>
+        <p:cNvPr id="160" name="Shape 160"/>
         <p:cNvGrpSpPr/>
         <p:nvPr/>
       </p:nvGrpSpPr>
@@ -7228,7 +7260,7 @@
       </p:grpSpPr>
       <p:sp>
         <p:nvSpPr>
-          <p:cNvPr id="159" name="Google Shape;159;p8:notes"/>
+          <p:cNvPr id="161" name="Google Shape;161;p8:notes"/>
           <p:cNvSpPr/>
           <p:nvPr>
             <p:ph idx="2" type="sldImg"/>
@@ -7273,7 +7305,7 @@
       </p:sp>
       <p:sp>
         <p:nvSpPr>
-          <p:cNvPr id="160" name="Google Shape;160;p8:notes"/>
+          <p:cNvPr id="162" name="Google Shape;162;p8:notes"/>
           <p:cNvSpPr txBox="1"/>
           <p:nvPr>
             <p:ph idx="1" type="body"/>
@@ -7466,7 +7498,7 @@
       </p:sp>
       <p:sp>
         <p:nvSpPr>
-          <p:cNvPr id="161" name="Google Shape;161;p8:notes"/>
+          <p:cNvPr id="163" name="Google Shape;163;p8:notes"/>
           <p:cNvSpPr txBox="1"/>
           <p:nvPr>
             <p:ph idx="12" type="sldNum"/>
@@ -7521,7 +7553,7 @@
   <p:cSld>
     <p:spTree>
       <p:nvGrpSpPr>
-        <p:cNvPr id="166" name="Shape 166"/>
+        <p:cNvPr id="168" name="Shape 168"/>
         <p:cNvGrpSpPr/>
         <p:nvPr/>
       </p:nvGrpSpPr>
@@ -7535,7 +7567,7 @@
       </p:grpSpPr>
       <p:sp>
         <p:nvSpPr>
-          <p:cNvPr id="167" name="Google Shape;167;p9:notes"/>
+          <p:cNvPr id="169" name="Google Shape;169;p9:notes"/>
           <p:cNvSpPr/>
           <p:nvPr>
             <p:ph idx="2" type="sldImg"/>
@@ -7580,7 +7612,7 @@
       </p:sp>
       <p:sp>
         <p:nvSpPr>
-          <p:cNvPr id="168" name="Google Shape;168;p9:notes"/>
+          <p:cNvPr id="170" name="Google Shape;170;p9:notes"/>
           <p:cNvSpPr txBox="1"/>
           <p:nvPr>
             <p:ph idx="1" type="body"/>
@@ -8008,7 +8040,7 @@
       </p:sp>
       <p:sp>
         <p:nvSpPr>
-          <p:cNvPr id="169" name="Google Shape;169;p9:notes"/>
+          <p:cNvPr id="171" name="Google Shape;171;p9:notes"/>
           <p:cNvSpPr txBox="1"/>
           <p:nvPr>
             <p:ph idx="12" type="sldNum"/>
@@ -9645,7 +9677,7 @@
     </p:bg>
     <p:spTree>
       <p:nvGrpSpPr>
-        <p:cNvPr id="193" name="Shape 193"/>
+        <p:cNvPr id="196" name="Shape 196"/>
         <p:cNvGrpSpPr/>
         <p:nvPr/>
       </p:nvGrpSpPr>
@@ -9659,7 +9691,7 @@
       </p:grpSpPr>
       <p:sp>
         <p:nvSpPr>
-          <p:cNvPr id="194" name="Google Shape;194;p10"/>
+          <p:cNvPr id="197" name="Google Shape;197;p10"/>
           <p:cNvSpPr/>
           <p:nvPr/>
         </p:nvSpPr>
@@ -9722,7 +9754,7 @@
       </p:sp>
       <p:sp>
         <p:nvSpPr>
-          <p:cNvPr id="195" name="Google Shape;195;p10"/>
+          <p:cNvPr id="198" name="Google Shape;198;p10"/>
           <p:cNvSpPr/>
           <p:nvPr/>
         </p:nvSpPr>
@@ -9785,7 +9817,7 @@
       </p:sp>
       <p:sp>
         <p:nvSpPr>
-          <p:cNvPr id="196" name="Google Shape;196;p10"/>
+          <p:cNvPr id="199" name="Google Shape;199;p10"/>
           <p:cNvSpPr/>
           <p:nvPr/>
         </p:nvSpPr>
@@ -9848,7 +9880,7 @@
       </p:sp>
       <p:sp>
         <p:nvSpPr>
-          <p:cNvPr id="197" name="Google Shape;197;p10"/>
+          <p:cNvPr id="200" name="Google Shape;200;p10"/>
           <p:cNvSpPr/>
           <p:nvPr/>
         </p:nvSpPr>
@@ -9899,7 +9931,7 @@
       </p:sp>
       <p:sp>
         <p:nvSpPr>
-          <p:cNvPr id="198" name="Google Shape;198;p10"/>
+          <p:cNvPr id="201" name="Google Shape;201;p10"/>
           <p:cNvSpPr/>
           <p:nvPr/>
         </p:nvSpPr>
@@ -9962,7 +9994,7 @@
       </p:sp>
       <p:sp>
         <p:nvSpPr>
-          <p:cNvPr id="199" name="Google Shape;199;p10"/>
+          <p:cNvPr id="202" name="Google Shape;202;p10"/>
           <p:cNvSpPr/>
           <p:nvPr/>
         </p:nvSpPr>
@@ -10011,7 +10043,7 @@
       </p:sp>
       <p:sp>
         <p:nvSpPr>
-          <p:cNvPr id="200" name="Google Shape;200;p10"/>
+          <p:cNvPr id="203" name="Google Shape;203;p10"/>
           <p:cNvSpPr/>
           <p:nvPr/>
         </p:nvSpPr>
@@ -10086,7 +10118,7 @@
       </p:sp>
       <p:sp>
         <p:nvSpPr>
-          <p:cNvPr id="201" name="Google Shape;201;p10"/>
+          <p:cNvPr id="204" name="Google Shape;204;p10"/>
           <p:cNvSpPr/>
           <p:nvPr/>
         </p:nvSpPr>
@@ -10137,7 +10169,7 @@
       </p:sp>
       <p:sp>
         <p:nvSpPr>
-          <p:cNvPr id="202" name="Google Shape;202;p10"/>
+          <p:cNvPr id="205" name="Google Shape;205;p10"/>
           <p:cNvSpPr/>
           <p:nvPr/>
         </p:nvSpPr>
@@ -10200,7 +10232,7 @@
       </p:sp>
       <p:sp>
         <p:nvSpPr>
-          <p:cNvPr id="203" name="Google Shape;203;p10"/>
+          <p:cNvPr id="206" name="Google Shape;206;p10"/>
           <p:cNvSpPr/>
           <p:nvPr/>
         </p:nvSpPr>
@@ -10263,7 +10295,7 @@
       </p:sp>
       <p:sp>
         <p:nvSpPr>
-          <p:cNvPr id="204" name="Google Shape;204;p10"/>
+          <p:cNvPr id="207" name="Google Shape;207;p10"/>
           <p:cNvSpPr/>
           <p:nvPr/>
         </p:nvSpPr>
@@ -10329,7 +10361,7 @@
       </p:sp>
       <p:sp>
         <p:nvSpPr>
-          <p:cNvPr id="205" name="Google Shape;205;p10"/>
+          <p:cNvPr id="208" name="Google Shape;208;p10"/>
           <p:cNvSpPr/>
           <p:nvPr/>
         </p:nvSpPr>
@@ -10392,7 +10424,7 @@
       </p:sp>
       <p:sp>
         <p:nvSpPr>
-          <p:cNvPr id="206" name="Google Shape;206;p10"/>
+          <p:cNvPr id="209" name="Google Shape;209;p10"/>
           <p:cNvSpPr/>
           <p:nvPr/>
         </p:nvSpPr>
@@ -10443,7 +10475,7 @@
       </p:sp>
       <p:sp>
         <p:nvSpPr>
-          <p:cNvPr id="207" name="Google Shape;207;p10"/>
+          <p:cNvPr id="210" name="Google Shape;210;p10"/>
           <p:cNvSpPr/>
           <p:nvPr/>
         </p:nvSpPr>
@@ -10506,7 +10538,7 @@
       </p:sp>
       <p:sp>
         <p:nvSpPr>
-          <p:cNvPr id="208" name="Google Shape;208;p10"/>
+          <p:cNvPr id="211" name="Google Shape;211;p10"/>
           <p:cNvSpPr/>
           <p:nvPr/>
         </p:nvSpPr>
@@ -10569,7 +10601,7 @@
       </p:sp>
       <p:sp>
         <p:nvSpPr>
-          <p:cNvPr id="209" name="Google Shape;209;p10"/>
+          <p:cNvPr id="212" name="Google Shape;212;p10"/>
           <p:cNvSpPr/>
           <p:nvPr/>
         </p:nvSpPr>
@@ -10635,7 +10667,7 @@
       </p:sp>
       <p:sp>
         <p:nvSpPr>
-          <p:cNvPr id="210" name="Google Shape;210;p10"/>
+          <p:cNvPr id="213" name="Google Shape;213;p10"/>
           <p:cNvSpPr/>
           <p:nvPr/>
         </p:nvSpPr>
@@ -10680,7 +10712,7 @@
       </p:sp>
       <p:sp>
         <p:nvSpPr>
-          <p:cNvPr id="211" name="Google Shape;211;p10"/>
+          <p:cNvPr id="214" name="Google Shape;214;p10"/>
           <p:cNvSpPr/>
           <p:nvPr/>
         </p:nvSpPr>
@@ -10756,6 +10788,34 @@
           </a:p>
         </p:txBody>
       </p:sp>
+      <p:pic>
+        <p:nvPicPr>
+          <p:cNvPr id="215" name="Google Shape;215;p10" title="Screenshot 2026-08-07 at 8.30.46.png"/>
+          <p:cNvPicPr preferRelativeResize="0"/>
+          <p:nvPr/>
+        </p:nvPicPr>
+        <p:blipFill>
+          <a:blip r:embed="rId3">
+            <a:alphaModFix/>
+          </a:blip>
+          <a:stretch>
+            <a:fillRect/>
+          </a:stretch>
+        </p:blipFill>
+        <p:spPr>
+          <a:xfrm>
+            <a:off x="7130425" y="3675708"/>
+            <a:ext cx="3981450" cy="1343025"/>
+          </a:xfrm>
+          <a:prstGeom prst="rect">
+            <a:avLst/>
+          </a:prstGeom>
+          <a:noFill/>
+          <a:ln>
+            <a:noFill/>
+          </a:ln>
+        </p:spPr>
+      </p:pic>
     </p:spTree>
   </p:cSld>
   <p:clrMapOvr>
@@ -10776,7 +10836,7 @@
     </p:bg>
     <p:spTree>
       <p:nvGrpSpPr>
-        <p:cNvPr id="216" name="Shape 216"/>
+        <p:cNvPr id="220" name="Shape 220"/>
         <p:cNvGrpSpPr/>
         <p:nvPr/>
       </p:nvGrpSpPr>
@@ -10790,7 +10850,7 @@
       </p:grpSpPr>
       <p:sp>
         <p:nvSpPr>
-          <p:cNvPr id="217" name="Google Shape;217;p11"/>
+          <p:cNvPr id="221" name="Google Shape;221;p11"/>
           <p:cNvSpPr/>
           <p:nvPr/>
         </p:nvSpPr>
@@ -10853,7 +10913,7 @@
       </p:sp>
       <p:sp>
         <p:nvSpPr>
-          <p:cNvPr id="218" name="Google Shape;218;p11"/>
+          <p:cNvPr id="222" name="Google Shape;222;p11"/>
           <p:cNvSpPr/>
           <p:nvPr/>
         </p:nvSpPr>
@@ -10916,7 +10976,7 @@
       </p:sp>
       <p:sp>
         <p:nvSpPr>
-          <p:cNvPr id="219" name="Google Shape;219;p11"/>
+          <p:cNvPr id="223" name="Google Shape;223;p11"/>
           <p:cNvSpPr/>
           <p:nvPr/>
         </p:nvSpPr>
@@ -10979,7 +11039,7 @@
       </p:sp>
       <p:sp>
         <p:nvSpPr>
-          <p:cNvPr id="220" name="Google Shape;220;p11"/>
+          <p:cNvPr id="224" name="Google Shape;224;p11"/>
           <p:cNvSpPr/>
           <p:nvPr/>
         </p:nvSpPr>
@@ -11030,7 +11090,7 @@
       </p:sp>
       <p:sp>
         <p:nvSpPr>
-          <p:cNvPr id="221" name="Google Shape;221;p11"/>
+          <p:cNvPr id="225" name="Google Shape;225;p11"/>
           <p:cNvSpPr/>
           <p:nvPr/>
         </p:nvSpPr>
@@ -11093,7 +11153,7 @@
       </p:sp>
       <p:sp>
         <p:nvSpPr>
-          <p:cNvPr id="222" name="Google Shape;222;p11"/>
+          <p:cNvPr id="226" name="Google Shape;226;p11"/>
           <p:cNvSpPr/>
           <p:nvPr/>
         </p:nvSpPr>
@@ -11144,7 +11204,7 @@
       </p:sp>
       <p:sp>
         <p:nvSpPr>
-          <p:cNvPr id="223" name="Google Shape;223;p11"/>
+          <p:cNvPr id="227" name="Google Shape;227;p11"/>
           <p:cNvSpPr/>
           <p:nvPr/>
         </p:nvSpPr>
@@ -11187,7 +11247,7 @@
       </p:sp>
       <p:sp>
         <p:nvSpPr>
-          <p:cNvPr id="224" name="Google Shape;224;p11"/>
+          <p:cNvPr id="228" name="Google Shape;228;p11"/>
           <p:cNvSpPr/>
           <p:nvPr/>
         </p:nvSpPr>
@@ -11250,7 +11310,7 @@
       </p:sp>
       <p:sp>
         <p:nvSpPr>
-          <p:cNvPr id="225" name="Google Shape;225;p11"/>
+          <p:cNvPr id="229" name="Google Shape;229;p11"/>
           <p:cNvSpPr/>
           <p:nvPr/>
         </p:nvSpPr>
@@ -11313,7 +11373,7 @@
       </p:sp>
       <p:sp>
         <p:nvSpPr>
-          <p:cNvPr id="226" name="Google Shape;226;p11"/>
+          <p:cNvPr id="230" name="Google Shape;230;p11"/>
           <p:cNvSpPr/>
           <p:nvPr/>
         </p:nvSpPr>
@@ -11379,7 +11439,7 @@
       </p:sp>
       <p:sp>
         <p:nvSpPr>
-          <p:cNvPr id="227" name="Google Shape;227;p11"/>
+          <p:cNvPr id="231" name="Google Shape;231;p11"/>
           <p:cNvSpPr/>
           <p:nvPr/>
         </p:nvSpPr>
@@ -11430,7 +11490,7 @@
       </p:sp>
       <p:sp>
         <p:nvSpPr>
-          <p:cNvPr id="228" name="Google Shape;228;p11"/>
+          <p:cNvPr id="232" name="Google Shape;232;p11"/>
           <p:cNvSpPr/>
           <p:nvPr/>
         </p:nvSpPr>
@@ -11473,7 +11533,7 @@
       </p:sp>
       <p:sp>
         <p:nvSpPr>
-          <p:cNvPr id="229" name="Google Shape;229;p11"/>
+          <p:cNvPr id="233" name="Google Shape;233;p11"/>
           <p:cNvSpPr/>
           <p:nvPr/>
         </p:nvSpPr>
@@ -11536,7 +11596,7 @@
       </p:sp>
       <p:sp>
         <p:nvSpPr>
-          <p:cNvPr id="230" name="Google Shape;230;p11"/>
+          <p:cNvPr id="234" name="Google Shape;234;p11"/>
           <p:cNvSpPr/>
           <p:nvPr/>
         </p:nvSpPr>
@@ -11599,7 +11659,7 @@
       </p:sp>
       <p:sp>
         <p:nvSpPr>
-          <p:cNvPr id="231" name="Google Shape;231;p11"/>
+          <p:cNvPr id="235" name="Google Shape;235;p11"/>
           <p:cNvSpPr/>
           <p:nvPr/>
         </p:nvSpPr>
@@ -11665,7 +11725,7 @@
       </p:sp>
       <p:sp>
         <p:nvSpPr>
-          <p:cNvPr id="232" name="Google Shape;232;p11"/>
+          <p:cNvPr id="236" name="Google Shape;236;p11"/>
           <p:cNvSpPr/>
           <p:nvPr/>
         </p:nvSpPr>
@@ -11716,7 +11776,7 @@
       </p:sp>
       <p:sp>
         <p:nvSpPr>
-          <p:cNvPr id="233" name="Google Shape;233;p11"/>
+          <p:cNvPr id="237" name="Google Shape;237;p11"/>
           <p:cNvSpPr/>
           <p:nvPr/>
         </p:nvSpPr>
@@ -11759,7 +11819,7 @@
       </p:sp>
       <p:sp>
         <p:nvSpPr>
-          <p:cNvPr id="234" name="Google Shape;234;p11"/>
+          <p:cNvPr id="238" name="Google Shape;238;p11"/>
           <p:cNvSpPr/>
           <p:nvPr/>
         </p:nvSpPr>
@@ -11822,7 +11882,7 @@
       </p:sp>
       <p:sp>
         <p:nvSpPr>
-          <p:cNvPr id="235" name="Google Shape;235;p11"/>
+          <p:cNvPr id="239" name="Google Shape;239;p11"/>
           <p:cNvSpPr/>
           <p:nvPr/>
         </p:nvSpPr>
@@ -11909,7 +11969,7 @@
       </p:sp>
       <p:sp>
         <p:nvSpPr>
-          <p:cNvPr id="236" name="Google Shape;236;p11"/>
+          <p:cNvPr id="240" name="Google Shape;240;p11"/>
           <p:cNvSpPr/>
           <p:nvPr/>
         </p:nvSpPr>
@@ -11993,7 +12053,7 @@
     </p:bg>
     <p:spTree>
       <p:nvGrpSpPr>
-        <p:cNvPr id="241" name="Shape 241"/>
+        <p:cNvPr id="245" name="Shape 245"/>
         <p:cNvGrpSpPr/>
         <p:nvPr/>
       </p:nvGrpSpPr>
@@ -12007,7 +12067,7 @@
       </p:grpSpPr>
       <p:sp>
         <p:nvSpPr>
-          <p:cNvPr id="242" name="Google Shape;242;p12"/>
+          <p:cNvPr id="246" name="Google Shape;246;p12"/>
           <p:cNvSpPr/>
           <p:nvPr/>
         </p:nvSpPr>
@@ -12070,7 +12130,7 @@
       </p:sp>
       <p:sp>
         <p:nvSpPr>
-          <p:cNvPr id="243" name="Google Shape;243;p12"/>
+          <p:cNvPr id="247" name="Google Shape;247;p12"/>
           <p:cNvSpPr/>
           <p:nvPr/>
         </p:nvSpPr>
@@ -12133,7 +12193,7 @@
       </p:sp>
       <p:sp>
         <p:nvSpPr>
-          <p:cNvPr id="244" name="Google Shape;244;p12"/>
+          <p:cNvPr id="248" name="Google Shape;248;p12"/>
           <p:cNvSpPr/>
           <p:nvPr/>
         </p:nvSpPr>
@@ -12184,7 +12244,7 @@
       </p:sp>
       <p:sp>
         <p:nvSpPr>
-          <p:cNvPr id="245" name="Google Shape;245;p12"/>
+          <p:cNvPr id="249" name="Google Shape;249;p12"/>
           <p:cNvSpPr/>
           <p:nvPr/>
         </p:nvSpPr>
@@ -12247,7 +12307,7 @@
       </p:sp>
       <p:sp>
         <p:nvSpPr>
-          <p:cNvPr id="246" name="Google Shape;246;p12"/>
+          <p:cNvPr id="250" name="Google Shape;250;p12"/>
           <p:cNvSpPr/>
           <p:nvPr/>
         </p:nvSpPr>
@@ -12313,7 +12373,7 @@
       </p:sp>
       <p:sp>
         <p:nvSpPr>
-          <p:cNvPr id="247" name="Google Shape;247;p12"/>
+          <p:cNvPr id="251" name="Google Shape;251;p12"/>
           <p:cNvSpPr/>
           <p:nvPr/>
         </p:nvSpPr>
@@ -12364,7 +12424,7 @@
       </p:sp>
       <p:sp>
         <p:nvSpPr>
-          <p:cNvPr id="248" name="Google Shape;248;p12"/>
+          <p:cNvPr id="252" name="Google Shape;252;p12"/>
           <p:cNvSpPr/>
           <p:nvPr/>
         </p:nvSpPr>
@@ -12427,7 +12487,7 @@
       </p:sp>
       <p:sp>
         <p:nvSpPr>
-          <p:cNvPr id="249" name="Google Shape;249;p12"/>
+          <p:cNvPr id="253" name="Google Shape;253;p12"/>
           <p:cNvSpPr/>
           <p:nvPr/>
         </p:nvSpPr>
@@ -12493,7 +12553,7 @@
       </p:sp>
       <p:sp>
         <p:nvSpPr>
-          <p:cNvPr id="250" name="Google Shape;250;p12"/>
+          <p:cNvPr id="254" name="Google Shape;254;p12"/>
           <p:cNvSpPr/>
           <p:nvPr/>
         </p:nvSpPr>
@@ -12538,7 +12598,7 @@
       </p:sp>
       <p:sp>
         <p:nvSpPr>
-          <p:cNvPr id="251" name="Google Shape;251;p12"/>
+          <p:cNvPr id="255" name="Google Shape;255;p12"/>
           <p:cNvSpPr/>
           <p:nvPr/>
         </p:nvSpPr>
@@ -12616,7 +12676,7 @@
       </p:sp>
       <p:sp>
         <p:nvSpPr>
-          <p:cNvPr id="252" name="Google Shape;252;p12"/>
+          <p:cNvPr id="256" name="Google Shape;256;p12"/>
           <p:cNvSpPr/>
           <p:nvPr/>
         </p:nvSpPr>
@@ -16534,8 +16594,8 @@
         </p:nvSpPr>
         <p:spPr>
           <a:xfrm>
-            <a:off x="731520" y="3063240"/>
-            <a:ext cx="4892040" cy="1691640"/>
+            <a:off x="3267080" y="3063250"/>
+            <a:ext cx="2356500" cy="1691700"/>
           </a:xfrm>
           <a:prstGeom prst="rect">
             <a:avLst/>
@@ -16840,8 +16900,8 @@
         </p:nvSpPr>
         <p:spPr>
           <a:xfrm>
-            <a:off x="6675120" y="3063240"/>
-            <a:ext cx="4892040" cy="1691640"/>
+            <a:off x="6675125" y="3063250"/>
+            <a:ext cx="2011800" cy="1691700"/>
           </a:xfrm>
           <a:prstGeom prst="rect">
             <a:avLst/>
@@ -17021,6 +17081,62 @@
           </a:p>
         </p:txBody>
       </p:sp>
+      <p:pic>
+        <p:nvPicPr>
+          <p:cNvPr id="115" name="Google Shape;115;p5" title="Screenshot 2026-08-07 at 8.27.12.png"/>
+          <p:cNvPicPr preferRelativeResize="0"/>
+          <p:nvPr/>
+        </p:nvPicPr>
+        <p:blipFill>
+          <a:blip r:embed="rId3">
+            <a:alphaModFix/>
+          </a:blip>
+          <a:stretch>
+            <a:fillRect/>
+          </a:stretch>
+        </p:blipFill>
+        <p:spPr>
+          <a:xfrm>
+            <a:off x="0" y="3080563"/>
+            <a:ext cx="3267075" cy="1419225"/>
+          </a:xfrm>
+          <a:prstGeom prst="rect">
+            <a:avLst/>
+          </a:prstGeom>
+          <a:noFill/>
+          <a:ln>
+            <a:noFill/>
+          </a:ln>
+        </p:spPr>
+      </p:pic>
+      <p:pic>
+        <p:nvPicPr>
+          <p:cNvPr id="116" name="Google Shape;116;p5" title="Screenshot 2026-08-07 at 8.27.30.png"/>
+          <p:cNvPicPr preferRelativeResize="0"/>
+          <p:nvPr/>
+        </p:nvPicPr>
+        <p:blipFill>
+          <a:blip r:embed="rId4">
+            <a:alphaModFix/>
+          </a:blip>
+          <a:stretch>
+            <a:fillRect/>
+          </a:stretch>
+        </p:blipFill>
+        <p:spPr>
+          <a:xfrm>
+            <a:off x="8686925" y="3080564"/>
+            <a:ext cx="3505075" cy="1839536"/>
+          </a:xfrm>
+          <a:prstGeom prst="rect">
+            <a:avLst/>
+          </a:prstGeom>
+          <a:noFill/>
+          <a:ln>
+            <a:noFill/>
+          </a:ln>
+        </p:spPr>
+      </p:pic>
     </p:spTree>
   </p:cSld>
   <p:clrMapOvr>
@@ -17041,7 +17157,7 @@
     </p:bg>
     <p:spTree>
       <p:nvGrpSpPr>
-        <p:cNvPr id="119" name="Shape 119"/>
+        <p:cNvPr id="121" name="Shape 121"/>
         <p:cNvGrpSpPr/>
         <p:nvPr/>
       </p:nvGrpSpPr>
@@ -17055,7 +17171,7 @@
       </p:grpSpPr>
       <p:sp>
         <p:nvSpPr>
-          <p:cNvPr id="120" name="Google Shape;120;p6"/>
+          <p:cNvPr id="122" name="Google Shape;122;p6"/>
           <p:cNvSpPr/>
           <p:nvPr/>
         </p:nvSpPr>
@@ -17118,7 +17234,7 @@
       </p:sp>
       <p:sp>
         <p:nvSpPr>
-          <p:cNvPr id="121" name="Google Shape;121;p6"/>
+          <p:cNvPr id="123" name="Google Shape;123;p6"/>
           <p:cNvSpPr/>
           <p:nvPr/>
         </p:nvSpPr>
@@ -17181,7 +17297,7 @@
       </p:sp>
       <p:sp>
         <p:nvSpPr>
-          <p:cNvPr id="122" name="Google Shape;122;p6"/>
+          <p:cNvPr id="124" name="Google Shape;124;p6"/>
           <p:cNvSpPr/>
           <p:nvPr/>
         </p:nvSpPr>
@@ -17244,7 +17360,7 @@
       </p:sp>
       <p:sp>
         <p:nvSpPr>
-          <p:cNvPr id="123" name="Google Shape;123;p6"/>
+          <p:cNvPr id="125" name="Google Shape;125;p6"/>
           <p:cNvSpPr/>
           <p:nvPr/>
         </p:nvSpPr>
@@ -17295,7 +17411,7 @@
       </p:sp>
       <p:sp>
         <p:nvSpPr>
-          <p:cNvPr id="124" name="Google Shape;124;p6"/>
+          <p:cNvPr id="126" name="Google Shape;126;p6"/>
           <p:cNvSpPr/>
           <p:nvPr/>
         </p:nvSpPr>
@@ -17358,7 +17474,7 @@
       </p:sp>
       <p:sp>
         <p:nvSpPr>
-          <p:cNvPr id="125" name="Google Shape;125;p6"/>
+          <p:cNvPr id="127" name="Google Shape;127;p6"/>
           <p:cNvSpPr/>
           <p:nvPr/>
         </p:nvSpPr>
@@ -17409,7 +17525,7 @@
       </p:sp>
       <p:sp>
         <p:nvSpPr>
-          <p:cNvPr id="126" name="Google Shape;126;p6"/>
+          <p:cNvPr id="128" name="Google Shape;128;p6"/>
           <p:cNvSpPr/>
           <p:nvPr/>
         </p:nvSpPr>
@@ -17472,7 +17588,7 @@
       </p:sp>
       <p:sp>
         <p:nvSpPr>
-          <p:cNvPr id="127" name="Google Shape;127;p6"/>
+          <p:cNvPr id="129" name="Google Shape;129;p6"/>
           <p:cNvSpPr/>
           <p:nvPr/>
         </p:nvSpPr>
@@ -17547,7 +17663,7 @@
       </p:sp>
       <p:sp>
         <p:nvSpPr>
-          <p:cNvPr id="128" name="Google Shape;128;p6"/>
+          <p:cNvPr id="130" name="Google Shape;130;p6"/>
           <p:cNvSpPr/>
           <p:nvPr/>
         </p:nvSpPr>
@@ -17622,7 +17738,7 @@
       </p:sp>
       <p:sp>
         <p:nvSpPr>
-          <p:cNvPr id="129" name="Google Shape;129;p6"/>
+          <p:cNvPr id="131" name="Google Shape;131;p6"/>
           <p:cNvSpPr/>
           <p:nvPr/>
         </p:nvSpPr>
@@ -17673,7 +17789,7 @@
       </p:sp>
       <p:sp>
         <p:nvSpPr>
-          <p:cNvPr id="130" name="Google Shape;130;p6"/>
+          <p:cNvPr id="132" name="Google Shape;132;p6"/>
           <p:cNvSpPr/>
           <p:nvPr/>
         </p:nvSpPr>
@@ -17736,7 +17852,7 @@
       </p:sp>
       <p:sp>
         <p:nvSpPr>
-          <p:cNvPr id="131" name="Google Shape;131;p6"/>
+          <p:cNvPr id="133" name="Google Shape;133;p6"/>
           <p:cNvSpPr/>
           <p:nvPr/>
         </p:nvSpPr>
@@ -17811,7 +17927,7 @@
       </p:sp>
       <p:sp>
         <p:nvSpPr>
-          <p:cNvPr id="132" name="Google Shape;132;p6"/>
+          <p:cNvPr id="134" name="Google Shape;134;p6"/>
           <p:cNvSpPr/>
           <p:nvPr/>
         </p:nvSpPr>
@@ -17904,7 +18020,7 @@
     </p:bg>
     <p:spTree>
       <p:nvGrpSpPr>
-        <p:cNvPr id="137" name="Shape 137"/>
+        <p:cNvPr id="139" name="Shape 139"/>
         <p:cNvGrpSpPr/>
         <p:nvPr/>
       </p:nvGrpSpPr>
@@ -17918,7 +18034,7 @@
       </p:grpSpPr>
       <p:sp>
         <p:nvSpPr>
-          <p:cNvPr id="138" name="Google Shape;138;p7"/>
+          <p:cNvPr id="140" name="Google Shape;140;p7"/>
           <p:cNvSpPr/>
           <p:nvPr/>
         </p:nvSpPr>
@@ -17981,7 +18097,7 @@
       </p:sp>
       <p:sp>
         <p:nvSpPr>
-          <p:cNvPr id="139" name="Google Shape;139;p7"/>
+          <p:cNvPr id="141" name="Google Shape;141;p7"/>
           <p:cNvSpPr/>
           <p:nvPr/>
         </p:nvSpPr>
@@ -18044,7 +18160,7 @@
       </p:sp>
       <p:sp>
         <p:nvSpPr>
-          <p:cNvPr id="140" name="Google Shape;140;p7"/>
+          <p:cNvPr id="142" name="Google Shape;142;p7"/>
           <p:cNvSpPr/>
           <p:nvPr/>
         </p:nvSpPr>
@@ -18107,7 +18223,7 @@
       </p:sp>
       <p:sp>
         <p:nvSpPr>
-          <p:cNvPr id="141" name="Google Shape;141;p7"/>
+          <p:cNvPr id="143" name="Google Shape;143;p7"/>
           <p:cNvSpPr/>
           <p:nvPr/>
         </p:nvSpPr>
@@ -18158,7 +18274,7 @@
       </p:sp>
       <p:sp>
         <p:nvSpPr>
-          <p:cNvPr id="142" name="Google Shape;142;p7"/>
+          <p:cNvPr id="144" name="Google Shape;144;p7"/>
           <p:cNvSpPr/>
           <p:nvPr/>
         </p:nvSpPr>
@@ -18221,7 +18337,7 @@
       </p:sp>
       <p:sp>
         <p:nvSpPr>
-          <p:cNvPr id="143" name="Google Shape;143;p7"/>
+          <p:cNvPr id="145" name="Google Shape;145;p7"/>
           <p:cNvSpPr/>
           <p:nvPr/>
         </p:nvSpPr>
@@ -18272,7 +18388,7 @@
       </p:sp>
       <p:sp>
         <p:nvSpPr>
-          <p:cNvPr id="144" name="Google Shape;144;p7"/>
+          <p:cNvPr id="146" name="Google Shape;146;p7"/>
           <p:cNvSpPr/>
           <p:nvPr/>
         </p:nvSpPr>
@@ -18315,7 +18431,7 @@
       </p:sp>
       <p:sp>
         <p:nvSpPr>
-          <p:cNvPr id="145" name="Google Shape;145;p7"/>
+          <p:cNvPr id="147" name="Google Shape;147;p7"/>
           <p:cNvSpPr/>
           <p:nvPr/>
         </p:nvSpPr>
@@ -18378,7 +18494,7 @@
       </p:sp>
       <p:sp>
         <p:nvSpPr>
-          <p:cNvPr id="146" name="Google Shape;146;p7"/>
+          <p:cNvPr id="148" name="Google Shape;148;p7"/>
           <p:cNvSpPr/>
           <p:nvPr/>
         </p:nvSpPr>
@@ -18441,7 +18557,7 @@
       </p:sp>
       <p:sp>
         <p:nvSpPr>
-          <p:cNvPr id="147" name="Google Shape;147;p7"/>
+          <p:cNvPr id="149" name="Google Shape;149;p7"/>
           <p:cNvSpPr/>
           <p:nvPr/>
         </p:nvSpPr>
@@ -18507,7 +18623,7 @@
       </p:sp>
       <p:sp>
         <p:nvSpPr>
-          <p:cNvPr id="148" name="Google Shape;148;p7"/>
+          <p:cNvPr id="150" name="Google Shape;150;p7"/>
           <p:cNvSpPr/>
           <p:nvPr/>
         </p:nvSpPr>
@@ -18558,7 +18674,7 @@
       </p:sp>
       <p:sp>
         <p:nvSpPr>
-          <p:cNvPr id="149" name="Google Shape;149;p7"/>
+          <p:cNvPr id="151" name="Google Shape;151;p7"/>
           <p:cNvSpPr/>
           <p:nvPr/>
         </p:nvSpPr>
@@ -18601,7 +18717,7 @@
       </p:sp>
       <p:sp>
         <p:nvSpPr>
-          <p:cNvPr id="150" name="Google Shape;150;p7"/>
+          <p:cNvPr id="152" name="Google Shape;152;p7"/>
           <p:cNvSpPr/>
           <p:nvPr/>
         </p:nvSpPr>
@@ -18664,7 +18780,7 @@
       </p:sp>
       <p:sp>
         <p:nvSpPr>
-          <p:cNvPr id="151" name="Google Shape;151;p7"/>
+          <p:cNvPr id="153" name="Google Shape;153;p7"/>
           <p:cNvSpPr/>
           <p:nvPr/>
         </p:nvSpPr>
@@ -18727,7 +18843,7 @@
       </p:sp>
       <p:sp>
         <p:nvSpPr>
-          <p:cNvPr id="152" name="Google Shape;152;p7"/>
+          <p:cNvPr id="154" name="Google Shape;154;p7"/>
           <p:cNvSpPr/>
           <p:nvPr/>
         </p:nvSpPr>
@@ -18793,7 +18909,7 @@
       </p:sp>
       <p:sp>
         <p:nvSpPr>
-          <p:cNvPr id="153" name="Google Shape;153;p7"/>
+          <p:cNvPr id="155" name="Google Shape;155;p7"/>
           <p:cNvSpPr/>
           <p:nvPr/>
         </p:nvSpPr>
@@ -18844,7 +18960,7 @@
       </p:sp>
       <p:sp>
         <p:nvSpPr>
-          <p:cNvPr id="154" name="Google Shape;154;p7"/>
+          <p:cNvPr id="156" name="Google Shape;156;p7"/>
           <p:cNvSpPr/>
           <p:nvPr/>
         </p:nvSpPr>
@@ -18887,7 +19003,7 @@
       </p:sp>
       <p:sp>
         <p:nvSpPr>
-          <p:cNvPr id="155" name="Google Shape;155;p7"/>
+          <p:cNvPr id="157" name="Google Shape;157;p7"/>
           <p:cNvSpPr/>
           <p:nvPr/>
         </p:nvSpPr>
@@ -18950,7 +19066,7 @@
       </p:sp>
       <p:sp>
         <p:nvSpPr>
-          <p:cNvPr id="156" name="Google Shape;156;p7"/>
+          <p:cNvPr id="158" name="Google Shape;158;p7"/>
           <p:cNvSpPr/>
           <p:nvPr/>
         </p:nvSpPr>
@@ -19085,7 +19201,7 @@
       </p:sp>
       <p:sp>
         <p:nvSpPr>
-          <p:cNvPr id="157" name="Google Shape;157;p7"/>
+          <p:cNvPr id="159" name="Google Shape;159;p7"/>
           <p:cNvSpPr/>
           <p:nvPr/>
         </p:nvSpPr>
@@ -19169,7 +19285,7 @@
     </p:bg>
     <p:spTree>
       <p:nvGrpSpPr>
-        <p:cNvPr id="162" name="Shape 162"/>
+        <p:cNvPr id="164" name="Shape 164"/>
         <p:cNvGrpSpPr/>
         <p:nvPr/>
       </p:nvGrpSpPr>
@@ -19183,7 +19299,7 @@
       </p:grpSpPr>
       <p:sp>
         <p:nvSpPr>
-          <p:cNvPr id="163" name="Google Shape;163;p8"/>
+          <p:cNvPr id="165" name="Google Shape;165;p8"/>
           <p:cNvSpPr/>
           <p:nvPr/>
         </p:nvSpPr>
@@ -19246,7 +19362,7 @@
       </p:sp>
       <p:sp>
         <p:nvSpPr>
-          <p:cNvPr id="164" name="Google Shape;164;p8"/>
+          <p:cNvPr id="166" name="Google Shape;166;p8"/>
           <p:cNvSpPr/>
           <p:nvPr/>
         </p:nvSpPr>
@@ -19309,7 +19425,7 @@
       </p:sp>
       <p:sp>
         <p:nvSpPr>
-          <p:cNvPr id="165" name="Google Shape;165;p8"/>
+          <p:cNvPr id="167" name="Google Shape;167;p8"/>
           <p:cNvSpPr/>
           <p:nvPr/>
         </p:nvSpPr>
@@ -19433,7 +19549,7 @@
     </p:bg>
     <p:spTree>
       <p:nvGrpSpPr>
-        <p:cNvPr id="170" name="Shape 170"/>
+        <p:cNvPr id="172" name="Shape 172"/>
         <p:cNvGrpSpPr/>
         <p:nvPr/>
       </p:nvGrpSpPr>
@@ -19447,7 +19563,7 @@
       </p:grpSpPr>
       <p:sp>
         <p:nvSpPr>
-          <p:cNvPr id="171" name="Google Shape;171;p9"/>
+          <p:cNvPr id="173" name="Google Shape;173;p9"/>
           <p:cNvSpPr/>
           <p:nvPr/>
         </p:nvSpPr>
@@ -19510,7 +19626,7 @@
       </p:sp>
       <p:sp>
         <p:nvSpPr>
-          <p:cNvPr id="172" name="Google Shape;172;p9"/>
+          <p:cNvPr id="174" name="Google Shape;174;p9"/>
           <p:cNvSpPr/>
           <p:nvPr/>
         </p:nvSpPr>
@@ -19573,7 +19689,7 @@
       </p:sp>
       <p:sp>
         <p:nvSpPr>
-          <p:cNvPr id="173" name="Google Shape;173;p9"/>
+          <p:cNvPr id="175" name="Google Shape;175;p9"/>
           <p:cNvSpPr/>
           <p:nvPr/>
         </p:nvSpPr>
@@ -19636,7 +19752,7 @@
       </p:sp>
       <p:sp>
         <p:nvSpPr>
-          <p:cNvPr id="174" name="Google Shape;174;p9"/>
+          <p:cNvPr id="176" name="Google Shape;176;p9"/>
           <p:cNvSpPr/>
           <p:nvPr/>
         </p:nvSpPr>
@@ -19687,7 +19803,7 @@
       </p:sp>
       <p:sp>
         <p:nvSpPr>
-          <p:cNvPr id="175" name="Google Shape;175;p9"/>
+          <p:cNvPr id="177" name="Google Shape;177;p9"/>
           <p:cNvSpPr/>
           <p:nvPr/>
         </p:nvSpPr>
@@ -19750,7 +19866,7 @@
       </p:sp>
       <p:sp>
         <p:nvSpPr>
-          <p:cNvPr id="176" name="Google Shape;176;p9"/>
+          <p:cNvPr id="178" name="Google Shape;178;p9"/>
           <p:cNvSpPr/>
           <p:nvPr/>
         </p:nvSpPr>
@@ -19799,7 +19915,7 @@
       </p:sp>
       <p:sp>
         <p:nvSpPr>
-          <p:cNvPr id="177" name="Google Shape;177;p9"/>
+          <p:cNvPr id="179" name="Google Shape;179;p9"/>
           <p:cNvSpPr/>
           <p:nvPr/>
         </p:nvSpPr>
@@ -19874,7 +19990,7 @@
       </p:sp>
       <p:sp>
         <p:nvSpPr>
-          <p:cNvPr id="178" name="Google Shape;178;p9"/>
+          <p:cNvPr id="180" name="Google Shape;180;p9"/>
           <p:cNvSpPr/>
           <p:nvPr/>
         </p:nvSpPr>
@@ -19925,7 +20041,7 @@
       </p:sp>
       <p:sp>
         <p:nvSpPr>
-          <p:cNvPr id="179" name="Google Shape;179;p9"/>
+          <p:cNvPr id="181" name="Google Shape;181;p9"/>
           <p:cNvSpPr/>
           <p:nvPr/>
         </p:nvSpPr>
@@ -19988,7 +20104,7 @@
       </p:sp>
       <p:sp>
         <p:nvSpPr>
-          <p:cNvPr id="180" name="Google Shape;180;p9"/>
+          <p:cNvPr id="182" name="Google Shape;182;p9"/>
           <p:cNvSpPr/>
           <p:nvPr/>
         </p:nvSpPr>
@@ -20051,7 +20167,7 @@
       </p:sp>
       <p:sp>
         <p:nvSpPr>
-          <p:cNvPr id="181" name="Google Shape;181;p9"/>
+          <p:cNvPr id="183" name="Google Shape;183;p9"/>
           <p:cNvSpPr/>
           <p:nvPr/>
         </p:nvSpPr>
@@ -20117,7 +20233,7 @@
       </p:sp>
       <p:sp>
         <p:nvSpPr>
-          <p:cNvPr id="182" name="Google Shape;182;p9"/>
+          <p:cNvPr id="184" name="Google Shape;184;p9"/>
           <p:cNvSpPr/>
           <p:nvPr/>
         </p:nvSpPr>
@@ -20180,7 +20296,7 @@
       </p:sp>
       <p:sp>
         <p:nvSpPr>
-          <p:cNvPr id="183" name="Google Shape;183;p9"/>
+          <p:cNvPr id="185" name="Google Shape;185;p9"/>
           <p:cNvSpPr/>
           <p:nvPr/>
         </p:nvSpPr>
@@ -20231,7 +20347,7 @@
       </p:sp>
       <p:sp>
         <p:nvSpPr>
-          <p:cNvPr id="184" name="Google Shape;184;p9"/>
+          <p:cNvPr id="186" name="Google Shape;186;p9"/>
           <p:cNvSpPr/>
           <p:nvPr/>
         </p:nvSpPr>
@@ -20294,7 +20410,7 @@
       </p:sp>
       <p:sp>
         <p:nvSpPr>
-          <p:cNvPr id="185" name="Google Shape;185;p9"/>
+          <p:cNvPr id="187" name="Google Shape;187;p9"/>
           <p:cNvSpPr/>
           <p:nvPr/>
         </p:nvSpPr>
@@ -20357,7 +20473,7 @@
       </p:sp>
       <p:sp>
         <p:nvSpPr>
-          <p:cNvPr id="186" name="Google Shape;186;p9"/>
+          <p:cNvPr id="188" name="Google Shape;188;p9"/>
           <p:cNvSpPr/>
           <p:nvPr/>
         </p:nvSpPr>
@@ -20423,7 +20539,7 @@
       </p:sp>
       <p:sp>
         <p:nvSpPr>
-          <p:cNvPr id="187" name="Google Shape;187;p9"/>
+          <p:cNvPr id="189" name="Google Shape;189;p9"/>
           <p:cNvSpPr/>
           <p:nvPr/>
         </p:nvSpPr>
@@ -20468,7 +20584,7 @@
       </p:sp>
       <p:sp>
         <p:nvSpPr>
-          <p:cNvPr id="188" name="Google Shape;188;p9"/>
+          <p:cNvPr id="190" name="Google Shape;190;p9"/>
           <p:cNvSpPr/>
           <p:nvPr/>
         </p:nvSpPr>
@@ -20544,6 +20660,34 @@
           </a:p>
         </p:txBody>
       </p:sp>
+      <p:pic>
+        <p:nvPicPr>
+          <p:cNvPr id="191" name="Google Shape;191;p9" title="Screenshot 2026-08-07 at 8.30.35.png"/>
+          <p:cNvPicPr preferRelativeResize="0"/>
+          <p:nvPr/>
+        </p:nvPicPr>
+        <p:blipFill>
+          <a:blip r:embed="rId3">
+            <a:alphaModFix/>
+          </a:blip>
+          <a:stretch>
+            <a:fillRect/>
+          </a:stretch>
+        </p:blipFill>
+        <p:spPr>
+          <a:xfrm>
+            <a:off x="6825625" y="3536646"/>
+            <a:ext cx="4591050" cy="1390650"/>
+          </a:xfrm>
+          <a:prstGeom prst="rect">
+            <a:avLst/>
+          </a:prstGeom>
+          <a:noFill/>
+          <a:ln>
+            <a:noFill/>
+          </a:ln>
+        </p:spPr>
+      </p:pic>
     </p:spTree>
   </p:cSld>
   <p:clrMapOvr>
